--- a/Onyx_GeorgeBrazil_Proposal.pptx
+++ b/Onyx_GeorgeBrazil_Proposal.pptx
@@ -3398,7 +3398,7 @@
                 <a:ea typeface="Calibri"/>
                 <a:cs typeface="Calibri"/>
               </a:rPr>
-              <a:t>HVAC · Plumbing · Electrical  ·  ESOP-owned</a:t>
+              <a:t>Plumbing · Electrical · ESOP-owned</a:t>
             </a:r>
           </a:p>
         </p:txBody>

--- a/Onyx_GeorgeBrazil_Proposal.pptx
+++ b/Onyx_GeorgeBrazil_Proposal.pptx
@@ -8201,7 +8201,7 @@
                 <a:ea typeface="Calibri"/>
                 <a:cs typeface="Calibri"/>
               </a:rPr>
-              <a:t>A named internal owner, with the outgoing CFO available during the handover</a:t>
+              <a:t>A named internal owner for the engagement</a:t>
             </a:r>
           </a:p>
         </p:txBody>
@@ -8783,7 +8783,7 @@
                 <a:ea typeface="Calibri"/>
                 <a:cs typeface="Calibri"/>
               </a:rPr>
-              <a:t>Share this proposal with Marc, Shawn and Josh. We are glad to join or answer questions beforehand.</a:t>
+              <a:t>Share this proposal with Marc, Shawn and Josh. We are glad to join your review, or give you and the team as much additional time as you need, at no charge.</a:t>
             </a:r>
           </a:p>
         </p:txBody>
@@ -12887,7 +12887,7 @@
                 <a:ea typeface="Calibri"/>
                 <a:cs typeface="Calibri"/>
               </a:rPr>
-              <a:t>Engagement leadership, the controller and CFO roles, management and bank reporting, and every judgment call. Your day-to-day contacts sit here.</a:t>
+              <a:t>Engagement leadership, the controller and CFO roles, and every judgment call. Scottsdale-based, and on-site in Phoenix for onboarding and training your team.</a:t>
             </a:r>
           </a:p>
         </p:txBody>
@@ -16136,7 +16136,7 @@
                 <a:ea typeface="Cambria"/>
                 <a:cs typeface="Cambria"/>
               </a:rPr>
-              <a:t>HANDOVER</a:t>
+              <a:t>ONBOARDING</a:t>
             </a:r>
           </a:p>
         </p:txBody>
@@ -16214,7 +16214,7 @@
                 <a:ea typeface="Calibri"/>
                 <a:cs typeface="Calibri"/>
               </a:rPr>
-              <a:t>Capture what the CFO knew before the trail goes cold</a:t>
+              <a:t>On-site in Phoenix to onboard and begin training Ian</a:t>
             </a:r>
           </a:p>
           <a:p>
@@ -16234,7 +16234,7 @@
                 <a:ea typeface="Calibri"/>
                 <a:cs typeface="Calibri"/>
               </a:rPr>
-              <a:t>Document the close, bank-reporting and systems processes</a:t>
+              <a:t>Capture what the CFO knew, before the trail goes cold</a:t>
             </a:r>
           </a:p>
           <a:p>
@@ -16254,7 +16254,7 @@
                 <a:ea typeface="Calibri"/>
                 <a:cs typeface="Calibri"/>
               </a:rPr>
-              <a:t>Review access, Sage Intacct and the chart of accounts</a:t>
+              <a:t>Document the close, bank-reporting and systems processes</a:t>
             </a:r>
           </a:p>
           <a:p>
@@ -16274,7 +16274,7 @@
                 <a:ea typeface="Calibri"/>
                 <a:cs typeface="Calibri"/>
               </a:rPr>
-              <a:t>Support the 401(k) audit and the ready tax-return hand-off</a:t>
+              <a:t>Review access and Sage Intacct, and support the 401(k) audit</a:t>
             </a:r>
           </a:p>
         </p:txBody>
@@ -18517,7 +18517,7 @@
                 <a:ea typeface="Calibri"/>
                 <a:cs typeface="Calibri"/>
               </a:rPr>
-              <a:t>Knowledge transfer &amp; CFO handover</a:t>
+              <a:t>On-site onboarding &amp; knowledge capture</a:t>
             </a:r>
           </a:p>
         </p:txBody>

--- a/Onyx_GeorgeBrazil_Proposal.pptx
+++ b/Onyx_GeorgeBrazil_Proposal.pptx
@@ -8783,7 +8783,7 @@
                 <a:ea typeface="Calibri"/>
                 <a:cs typeface="Calibri"/>
               </a:rPr>
-              <a:t>Share this proposal with Marc, Shawn and Josh. We are glad to join your review, or give you and the team as much additional time as you need, at no charge.</a:t>
+              <a:t>Share this proposal with Marc, Shawn and Josh. We are glad to join or answer questions beforehand.</a:t>
             </a:r>
           </a:p>
         </p:txBody>

--- a/Onyx_GeorgeBrazil_Proposal.pptx
+++ b/Onyx_GeorgeBrazil_Proposal.pptx
@@ -9410,80 +9410,6 @@
           <a:bodyPr rtlCol="0" anchor="ctr"/>
           <a:lstStyle/>
           <a:p/>
-        </p:txBody>
-      </p:sp>
-      <p:sp>
-        <p:nvSpPr>
-          <p:cNvPr id="24" name="TextBox 23"/>
-          <p:cNvSpPr txBox="1"/>
-          <p:nvPr/>
-        </p:nvSpPr>
-        <p:spPr>
-          <a:xfrm>
-            <a:off x="841247" y="4626864"/>
-            <a:ext cx="10506456" cy="237744"/>
-          </a:xfrm>
-          <a:prstGeom prst="rect">
-            <a:avLst/>
-          </a:prstGeom>
-          <a:noFill/>
-        </p:spPr>
-        <p:txBody>
-          <a:bodyPr wrap="square" lIns="0" tIns="0" rIns="0" bIns="0" anchor="t"/>
-          <a:lstStyle/>
-          <a:p>
-            <a:pPr algn="l" marL="0" indent="0">
-              <a:buNone/>
-            </a:pPr>
-            <a:r>
-              <a:rPr sz="1000" b="1" i="0">
-                <a:solidFill>
-                  <a:srgbClr val="B08D57"/>
-                </a:solidFill>
-                <a:latin typeface="Calibri"/>
-                <a:ea typeface="Calibri"/>
-                <a:cs typeface="Calibri"/>
-              </a:rPr>
-              <a:t>STANDING OFFER</a:t>
-            </a:r>
-          </a:p>
-        </p:txBody>
-      </p:sp>
-      <p:sp>
-        <p:nvSpPr>
-          <p:cNvPr id="25" name="TextBox 24"/>
-          <p:cNvSpPr txBox="1"/>
-          <p:nvPr/>
-        </p:nvSpPr>
-        <p:spPr>
-          <a:xfrm>
-            <a:off x="841247" y="4864608"/>
-            <a:ext cx="10506456" cy="292608"/>
-          </a:xfrm>
-          <a:prstGeom prst="rect">
-            <a:avLst/>
-          </a:prstGeom>
-          <a:noFill/>
-        </p:spPr>
-        <p:txBody>
-          <a:bodyPr wrap="square" lIns="0" tIns="0" rIns="0" bIns="0" anchor="t"/>
-          <a:lstStyle/>
-          <a:p>
-            <a:pPr algn="l" marL="0" indent="0">
-              <a:buNone/>
-            </a:pPr>
-            <a:r>
-              <a:rPr sz="1100" b="0" i="0">
-                <a:solidFill>
-                  <a:srgbClr val="D6D6D6"/>
-                </a:solidFill>
-                <a:latin typeface="Calibri"/>
-                <a:ea typeface="Calibri"/>
-                <a:cs typeface="Calibri"/>
-              </a:rPr>
-              <a:t>A complimentary accounting and treasury review each quarter with you and your executive board, for as long as we work together.</a:t>
-            </a:r>
-          </a:p>
         </p:txBody>
       </p:sp>
       <p:cxnSp>

--- a/Onyx_GeorgeBrazil_Proposal.pptx
+++ b/Onyx_GeorgeBrazil_Proposal.pptx
@@ -120,43 +120,43 @@
   <p:extLst>
     <p:ext uri="{521415D9-36F7-43E2-AB2F-B90AF26B5E84}">
       <p14:sectionLst xmlns:p14="http://schemas.microsoft.com/office/powerpoint/2010/main">
-        <p14:section name="Introduction" id="{3aaaa6bc-2390-4b09-ea5d-ddf692e8baeb}">
+        <p14:section name="Introduction" id="{b1d96e7a-d300-bde4-a091-80041a032d12}">
           <p14:sldIdLst>
             <p14:sldId id="256"/>
             <p14:sldId id="257"/>
             <p14:sldId id="258"/>
           </p14:sldIdLst>
         </p14:section>
-        <p14:section name="01 Who we are" id="{53299a3a-e365-d82f-93e2-59e919bda2d8}">
+        <p14:section name="01 Who we are" id="{5b6fda35-cd83-edd0-15f7-32d0b39d9957}">
           <p14:sldIdLst>
             <p14:sldId id="259"/>
             <p14:sldId id="260"/>
           </p14:sldIdLst>
         </p14:section>
-        <p14:section name="02 What we can help with" id="{b894b7c0-f082-40b4-8167-41a7a788ca98}">
+        <p14:section name="02 What we can help with" id="{1ba2d6a9-7847-603d-3342-13f58974195b}">
           <p14:sldIdLst>
             <p14:sldId id="261"/>
             <p14:sldId id="262"/>
             <p14:sldId id="263"/>
           </p14:sldIdLst>
         </p14:section>
-        <p14:section name="03 Engagement timeline" id="{a56f2e52-395e-74ad-bb17-d0a32f0cb33c}">
+        <p14:section name="03 Engagement timeline" id="{3f10b918-da9e-01c8-cf96-b789058d955d}">
           <p14:sldIdLst>
             <p14:sldId id="264"/>
           </p14:sldIdLst>
         </p14:section>
-        <p14:section name="04 30/60/90-day plan" id="{5eb1175b-7f51-b5fd-d86b-5c9c9fd96af0}">
+        <p14:section name="04 30/60/90-day plan" id="{f849e595-5ada-664d-0b5b-74e1cc260955}">
           <p14:sldIdLst>
             <p14:sldId id="265"/>
             <p14:sldId id="266"/>
           </p14:sldIdLst>
         </p14:section>
-        <p14:section name="05 Proposed fees" id="{647d2297-cffa-1abe-a5cd-27ff0c9c10eb}">
+        <p14:section name="05 Proposed fees" id="{25d3ef18-67c8-28e9-05a1-d5180be44661}">
           <p14:sldIdLst>
             <p14:sldId id="267"/>
           </p14:sldIdLst>
         </p14:section>
-        <p14:section name="06 Why ONYX and next steps" id="{23afce25-722e-4cad-06ff-37c1af78d06c}">
+        <p14:section name="06 Why ONYX and next steps" id="{a382a80e-98a7-b07c-2c3d-ad824c6add10}">
           <p14:sldIdLst>
             <p14:sldId id="268"/>
             <p14:sldId id="269"/>
@@ -1875,7 +1875,7 @@
         <p:spPr>
           <a:xfrm>
             <a:off x="10500055" y="301752"/>
-            <a:ext cx="1143000" cy="536753"/>
+            <a:ext cx="1143000" cy="537667"/>
           </a:xfrm>
           <a:prstGeom prst="rect">
             <a:avLst/>
@@ -2090,7 +2090,7 @@
         <p:spPr>
           <a:xfrm>
             <a:off x="548640" y="457200"/>
-            <a:ext cx="1463040" cy="686714"/>
+            <a:ext cx="1463040" cy="687629"/>
           </a:xfrm>
           <a:prstGeom prst="rect">
             <a:avLst/>
@@ -2464,7 +2464,7 @@
         <p:spPr>
           <a:xfrm>
             <a:off x="548640" y="548640"/>
-            <a:ext cx="1828800" cy="858622"/>
+            <a:ext cx="1828800" cy="859536"/>
           </a:xfrm>
           <a:prstGeom prst="rect">
             <a:avLst/>
@@ -7358,7 +7358,7 @@
                   <a:schemeClr val="tx1"/>
                 </a:solidFill>
               </a:rPr>
-              <a:t>Retainer of $3,000 before services begin, applied to the final invoice</a:t>
+              <a:t>Retainer of $3,000 before services begin, applied to the first invoice</a:t>
             </a:r>
             <a:endParaRPr lang="en-US" sz="1150" dirty="0"/>
           </a:p>
@@ -11708,7 +11708,7 @@
                   <a:schemeClr val="accent3"/>
                 </a:solidFill>
               </a:rPr>
-              <a:t>The principal leads the engagement and stays on it. The controller and staff roles are filled from our team at kickoff, and the mix is adjusted with you as the work settles.</a:t>
+              <a:t>The principal leads the engagement and stays on it. Jessica Bumphus, who joined us at the October 2 meeting, leads the controller work. Staff support is assigned at kickoff, and the mix is adjusted with you as the work settles.</a:t>
             </a:r>
             <a:endParaRPr lang="en-US" sz="1250" dirty="0"/>
           </a:p>
@@ -12600,7 +12600,7 @@
                           <a:ea typeface="Calibri" pitchFamily="34" charset="-122"/>
                           <a:cs typeface="Calibri" pitchFamily="34" charset="-120"/>
                         </a:rPr>
-                        <a:t>ONYX Controller</a:t>
+                        <a:t>Jessica Bumphus</a:t>
                       </a:r>
                       <a:endParaRPr lang="en-US" sz="1100" dirty="0">
                         <a:latin typeface="Calibri" charset="0"/>
@@ -12621,7 +12621,7 @@
                           <a:ea typeface="Calibri" pitchFamily="34" charset="-122"/>
                           <a:cs typeface="Calibri" pitchFamily="34" charset="-120"/>
                         </a:rPr>
-                        <a:t>Assigned at kickoff</a:t>
+                        <a:t>Controller, jessica@onyxcfo.com</a:t>
                       </a:r>
                       <a:endParaRPr lang="en-US" sz="1100" dirty="0">
                         <a:latin typeface="Calibri" charset="0"/>
@@ -12686,7 +12686,7 @@
                           <a:ea typeface="Calibri" pitchFamily="34" charset="-122"/>
                           <a:cs typeface="Calibri" pitchFamily="34" charset="-120"/>
                         </a:rPr>
-                        <a:t>Controller</a:t>
+                        <a:t>ONYX controller</a:t>
                       </a:r>
                       <a:endParaRPr lang="en-US" sz="1100" dirty="0">
                         <a:latin typeface="Calibri" charset="0"/>

--- a/Onyx_GeorgeBrazil_Proposal.pptx
+++ b/Onyx_GeorgeBrazil_Proposal.pptx
@@ -120,43 +120,43 @@
   <p:extLst>
     <p:ext uri="{521415D9-36F7-43E2-AB2F-B90AF26B5E84}">
       <p14:sectionLst xmlns:p14="http://schemas.microsoft.com/office/powerpoint/2010/main">
-        <p14:section name="Introduction" id="{b1d96e7a-d300-bde4-a091-80041a032d12}">
+        <p14:section name="Introduction" id="{8fd9e79a-e356-4544-6a09-9a1d45d72eae}">
           <p14:sldIdLst>
             <p14:sldId id="256"/>
             <p14:sldId id="257"/>
             <p14:sldId id="258"/>
           </p14:sldIdLst>
         </p14:section>
-        <p14:section name="01 Who we are" id="{5b6fda35-cd83-edd0-15f7-32d0b39d9957}">
+        <p14:section name="01 Who we are" id="{6920c485-f38d-0467-708e-bf131f7eedbf}">
           <p14:sldIdLst>
             <p14:sldId id="259"/>
             <p14:sldId id="260"/>
           </p14:sldIdLst>
         </p14:section>
-        <p14:section name="02 What we can help with" id="{1ba2d6a9-7847-603d-3342-13f58974195b}">
+        <p14:section name="02 What we can help with" id="{d865d581-ab5b-50e4-5ce6-5c1110189744}">
           <p14:sldIdLst>
             <p14:sldId id="261"/>
             <p14:sldId id="262"/>
             <p14:sldId id="263"/>
           </p14:sldIdLst>
         </p14:section>
-        <p14:section name="03 Engagement timeline" id="{3f10b918-da9e-01c8-cf96-b789058d955d}">
+        <p14:section name="03 Engagement timeline" id="{be9016a4-bced-42ae-d5bd-4f440ffb9306}">
           <p14:sldIdLst>
             <p14:sldId id="264"/>
           </p14:sldIdLst>
         </p14:section>
-        <p14:section name="04 30/60/90-day plan" id="{f849e595-5ada-664d-0b5b-74e1cc260955}">
+        <p14:section name="04 30/60/90-day plan" id="{d18e2fdc-9b0b-f83d-9c01-56e6f221050f}">
           <p14:sldIdLst>
             <p14:sldId id="265"/>
             <p14:sldId id="266"/>
           </p14:sldIdLst>
         </p14:section>
-        <p14:section name="05 Proposed fees" id="{25d3ef18-67c8-28e9-05a1-d5180be44661}">
+        <p14:section name="05 Proposed fees" id="{8a093d5d-e9fb-cdce-3c1b-581f527438cf}">
           <p14:sldIdLst>
             <p14:sldId id="267"/>
           </p14:sldIdLst>
         </p14:section>
-        <p14:section name="06 Why ONYX and next steps" id="{a382a80e-98a7-b07c-2c3d-ad824c6add10}">
+        <p14:section name="06 Why ONYX and next steps" id="{7ce09cf9-53e3-4c8f-df64-ad829310b33f}">
           <p14:sldIdLst>
             <p14:sldId id="268"/>
             <p14:sldId id="269"/>
@@ -566,7 +566,7 @@
           <a:p>
             <a:r>
               <a:rPr lang="en-US" dirty="0"/>
-              <a:t>Cover. Proposal accompanies the engagement letter sent October 5, 2026.</a:t>
+              <a:t>Cover. Proposal accompanies the engagement letter dated October 5, 2026.</a:t>
             </a:r>
             <a:endParaRPr lang="en-US" dirty="0"/>
           </a:p>
@@ -2543,7 +2543,7 @@
                   <a:schemeClr val="bg1"/>
                 </a:solidFill>
               </a:rPr>
-              <a:t>October 7, 2026</a:t>
+              <a:t>October 5, 2026</a:t>
             </a:r>
             <a:endParaRPr lang="en-US" sz="1200" dirty="0"/>
           </a:p>
@@ -9352,7 +9352,7 @@
                   <a:schemeClr val="accent3"/>
                 </a:solidFill>
               </a:rPr>
-              <a:t>October 7, 2026</a:t>
+              <a:t>October 5, 2026</a:t>
             </a:r>
             <a:endParaRPr lang="en-US" sz="1200" dirty="0"/>
           </a:p>
@@ -9491,7 +9491,7 @@
                   <a:schemeClr val="tx1"/>
                 </a:solidFill>
               </a:rPr>
-              <a:t>Thank you for the time you, Shawne, Josh and Ian gave us at your office on October 2. This proposal accompanies the engagement letter we sent on October 5 and describes how Onyx Accounting Group would support George Brazil following your CFO's departure.</a:t>
+              <a:t>Thank you for the time you, Shawne, Josh and Ian gave us at your office on October 2. This proposal accompanies the enclosed engagement letter and describes how Onyx Accounting Group would support George Brazil following your CFO's departure.</a:t>
             </a:r>
             <a:endParaRPr lang="en-US" sz="1250" dirty="0"/>
           </a:p>
@@ -12621,7 +12621,7 @@
                           <a:ea typeface="Calibri" pitchFamily="34" charset="-122"/>
                           <a:cs typeface="Calibri" pitchFamily="34" charset="-120"/>
                         </a:rPr>
-                        <a:t>Controller, jessica@onyxcfo.com</a:t>
+                        <a:t>Controller</a:t>
                       </a:r>
                       <a:endParaRPr lang="en-US" sz="1100" dirty="0">
                         <a:latin typeface="Calibri" charset="0"/>

--- a/Onyx_GeorgeBrazil_Proposal.pptx
+++ b/Onyx_GeorgeBrazil_Proposal.pptx
@@ -7972,7 +7972,7 @@
         </p:nvSpPr>
         <p:spPr>
           <a:xfrm>
-            <a:off x="548640" y="3794760"/>
+            <a:off x="548640" y="3904488"/>
             <a:ext cx="384048" cy="384048"/>
           </a:xfrm>
           <a:prstGeom prst="ellipse">
@@ -8004,7 +8004,7 @@
         </p:nvSpPr>
         <p:spPr>
           <a:xfrm>
-            <a:off x="548640" y="3794760"/>
+            <a:off x="548640" y="3904488"/>
             <a:ext cx="384048" cy="384048"/>
           </a:xfrm>
           <a:prstGeom prst="rect">
@@ -8040,7 +8040,7 @@
         </p:nvSpPr>
         <p:spPr>
           <a:xfrm>
-            <a:off x="1097280" y="3767328"/>
+            <a:off x="1097280" y="3877056"/>
             <a:ext cx="5212080" cy="274320"/>
           </a:xfrm>
           <a:prstGeom prst="rect">
@@ -8076,7 +8076,7 @@
         </p:nvSpPr>
         <p:spPr>
           <a:xfrm>
-            <a:off x="1097280" y="4041648"/>
+            <a:off x="1097280" y="4151376"/>
             <a:ext cx="5212080" cy="658368"/>
           </a:xfrm>
           <a:prstGeom prst="rect">
@@ -8112,7 +8112,7 @@
         </p:nvSpPr>
         <p:spPr>
           <a:xfrm>
-            <a:off x="548640" y="4727448"/>
+            <a:off x="548640" y="4837176"/>
             <a:ext cx="384048" cy="384048"/>
           </a:xfrm>
           <a:prstGeom prst="ellipse">
@@ -8144,7 +8144,7 @@
         </p:nvSpPr>
         <p:spPr>
           <a:xfrm>
-            <a:off x="548640" y="4727448"/>
+            <a:off x="548640" y="4837176"/>
             <a:ext cx="384048" cy="384048"/>
           </a:xfrm>
           <a:prstGeom prst="rect">
@@ -8180,7 +8180,7 @@
         </p:nvSpPr>
         <p:spPr>
           <a:xfrm>
-            <a:off x="1097280" y="4700016"/>
+            <a:off x="1097280" y="4809744"/>
             <a:ext cx="5212080" cy="274320"/>
           </a:xfrm>
           <a:prstGeom prst="rect">
@@ -8216,7 +8216,7 @@
         </p:nvSpPr>
         <p:spPr>
           <a:xfrm>
-            <a:off x="1097280" y="4974336"/>
+            <a:off x="1097280" y="5084064"/>
             <a:ext cx="5212080" cy="658368"/>
           </a:xfrm>
           <a:prstGeom prst="rect">
@@ -8545,7 +8545,7 @@
         </p:nvSpPr>
         <p:spPr>
           <a:xfrm>
-            <a:off x="7086600" y="4160520"/>
+            <a:off x="7086600" y="3977640"/>
             <a:ext cx="365760" cy="365760"/>
           </a:xfrm>
           <a:prstGeom prst="rect">
@@ -8584,7 +8584,7 @@
         </p:nvSpPr>
         <p:spPr>
           <a:xfrm>
-            <a:off x="7543800" y="4160520"/>
+            <a:off x="7543800" y="3977640"/>
             <a:ext cx="3779215" cy="274320"/>
           </a:xfrm>
           <a:prstGeom prst="rect">
@@ -8620,7 +8620,7 @@
         </p:nvSpPr>
         <p:spPr>
           <a:xfrm>
-            <a:off x="7543800" y="4434840"/>
+            <a:off x="7543800" y="4251960"/>
             <a:ext cx="3779215" cy="640080"/>
           </a:xfrm>
           <a:prstGeom prst="rect">
@@ -8656,7 +8656,7 @@
         </p:nvSpPr>
         <p:spPr>
           <a:xfrm>
-            <a:off x="7086600" y="5120640"/>
+            <a:off x="7086600" y="4937760"/>
             <a:ext cx="365760" cy="365760"/>
           </a:xfrm>
           <a:prstGeom prst="rect">
@@ -8695,7 +8695,7 @@
         </p:nvSpPr>
         <p:spPr>
           <a:xfrm>
-            <a:off x="7543800" y="5120640"/>
+            <a:off x="7543800" y="4937760"/>
             <a:ext cx="3779215" cy="274320"/>
           </a:xfrm>
           <a:prstGeom prst="rect">
@@ -8731,7 +8731,7 @@
         </p:nvSpPr>
         <p:spPr>
           <a:xfrm>
-            <a:off x="7543800" y="5394960"/>
+            <a:off x="7543800" y="5212080"/>
             <a:ext cx="3779215" cy="640080"/>
           </a:xfrm>
           <a:prstGeom prst="rect">

--- a/Onyx_GeorgeBrazil_Proposal.pptx
+++ b/Onyx_GeorgeBrazil_Proposal.pptx
@@ -11432,7 +11432,7 @@
         </p:nvSpPr>
         <p:spPr>
           <a:xfrm>
-            <a:off x="6858000" y="4050792"/>
+            <a:off x="6858000" y="3867912"/>
             <a:ext cx="4510735" cy="274320"/>
           </a:xfrm>
           <a:prstGeom prst="rect">
@@ -11468,7 +11468,7 @@
         </p:nvSpPr>
         <p:spPr>
           <a:xfrm>
-            <a:off x="6858000" y="4325112"/>
+            <a:off x="6858000" y="4142232"/>
             <a:ext cx="4510735" cy="658368"/>
           </a:xfrm>
           <a:prstGeom prst="rect">
@@ -11504,7 +11504,7 @@
         </p:nvSpPr>
         <p:spPr>
           <a:xfrm>
-            <a:off x="6858000" y="5010912"/>
+            <a:off x="6858000" y="4828032"/>
             <a:ext cx="4510735" cy="274320"/>
           </a:xfrm>
           <a:prstGeom prst="rect">
@@ -11540,7 +11540,7 @@
         </p:nvSpPr>
         <p:spPr>
           <a:xfrm>
-            <a:off x="6858000" y="5285232"/>
+            <a:off x="6858000" y="5102352"/>
             <a:ext cx="4510735" cy="658368"/>
           </a:xfrm>
           <a:prstGeom prst="rect">

--- a/Onyx_GeorgeBrazil_Proposal.pptx
+++ b/Onyx_GeorgeBrazil_Proposal.pptx
@@ -11074,7 +11074,7 @@
         </p:nvSpPr>
         <p:spPr>
           <a:xfrm>
-            <a:off x="548640" y="5212080"/>
+            <a:off x="548640" y="5065776"/>
             <a:ext cx="384048" cy="384048"/>
           </a:xfrm>
           <a:prstGeom prst="ellipse">
@@ -11106,7 +11106,7 @@
         </p:nvSpPr>
         <p:spPr>
           <a:xfrm>
-            <a:off x="548640" y="5212080"/>
+            <a:off x="548640" y="5065776"/>
             <a:ext cx="384048" cy="384048"/>
           </a:xfrm>
           <a:prstGeom prst="rect">
@@ -11142,7 +11142,7 @@
         </p:nvSpPr>
         <p:spPr>
           <a:xfrm>
-            <a:off x="1097280" y="5166360"/>
+            <a:off x="1097280" y="5020056"/>
             <a:ext cx="4937760" cy="274320"/>
           </a:xfrm>
           <a:prstGeom prst="rect">
@@ -11181,7 +11181,7 @@
         </p:nvSpPr>
         <p:spPr>
           <a:xfrm>
-            <a:off x="1097280" y="5440680"/>
+            <a:off x="1097280" y="5294376"/>
             <a:ext cx="4937760" cy="640080"/>
           </a:xfrm>
           <a:prstGeom prst="rect">
